--- a/out/gessi-jacqueline-77201/launch.pptx
+++ b/out/gessi-jacqueline-77201/launch.pptx
@@ -1494,7 +1494,7 @@
               <a:buNone/>
             </a:pPr>
             <a:r>
-              <a:rPr lang="en-US" sz="1250" dirty="0">
+              <a:rPr lang="en-US" sz="850" dirty="0">
                 <a:solidFill>
                   <a:srgbClr val="F2F2F2"/>
                 </a:solidFill>
@@ -1534,7 +1534,7 @@
               <a:buNone/>
             </a:pPr>
             <a:r>
-              <a:rPr lang="en-US" sz="1100" dirty="0">
+              <a:rPr lang="en-US" sz="1000" dirty="0">
                 <a:solidFill>
                   <a:srgbClr val="BDBDBD"/>
                 </a:solidFill>
@@ -2080,7 +2080,7 @@
               <a:buNone/>
             </a:pPr>
             <a:r>
-              <a:rPr lang="en-US" sz="1650" dirty="0" b="1">
+              <a:rPr lang="en-US" sz="1600" dirty="0" b="1">
                 <a:solidFill>
                   <a:srgbClr val="F2F2F2"/>
                 </a:solidFill>
@@ -2091,7 +2091,7 @@
               <a:t>מוצר: </a:t>
             </a:r>
             <a:r>
-              <a:rPr lang="en-US" sz="1650" dirty="0">
+              <a:rPr lang="en-US" sz="1600" dirty="0">
                 <a:solidFill>
                   <a:srgbClr val="F2F2F2"/>
                 </a:solidFill>
@@ -2107,7 +2107,7 @@
               <a:buNone/>
             </a:pPr>
             <a:r>
-              <a:rPr lang="en-US" sz="1650" dirty="0" b="1">
+              <a:rPr lang="en-US" sz="1600" dirty="0" b="1">
                 <a:solidFill>
                   <a:srgbClr val="F2F2F2"/>
                 </a:solidFill>
@@ -2118,7 +2118,7 @@
               <a:t>מותג / קולקציה: </a:t>
             </a:r>
             <a:r>
-              <a:rPr lang="en-US" sz="1650" dirty="0">
+              <a:rPr lang="en-US" sz="1600" dirty="0">
                 <a:solidFill>
                   <a:srgbClr val="F2F2F2"/>
                 </a:solidFill>
@@ -2134,7 +2134,7 @@
               <a:buNone/>
             </a:pPr>
             <a:r>
-              <a:rPr lang="en-US" sz="1650" dirty="0" b="1">
+              <a:rPr lang="en-US" sz="1600" dirty="0" b="1">
                 <a:solidFill>
                   <a:srgbClr val="F2F2F2"/>
                 </a:solidFill>
@@ -2145,7 +2145,7 @@
               <a:t>קטגוריה: </a:t>
             </a:r>
             <a:r>
-              <a:rPr lang="en-US" sz="1650" dirty="0">
+              <a:rPr lang="en-US" sz="1600" dirty="0">
                 <a:solidFill>
                   <a:srgbClr val="F2F2F2"/>
                 </a:solidFill>
@@ -2161,7 +2161,7 @@
               <a:buNone/>
             </a:pPr>
             <a:r>
-              <a:rPr lang="en-US" sz="1650" dirty="0" b="1">
+              <a:rPr lang="en-US" sz="1600" dirty="0" b="1">
                 <a:solidFill>
                   <a:srgbClr val="F2F2F2"/>
                 </a:solidFill>
@@ -2172,7 +2172,7 @@
               <a:t>מק"ט: </a:t>
             </a:r>
             <a:r>
-              <a:rPr lang="en-US" sz="1650" dirty="0">
+              <a:rPr lang="en-US" sz="1600" dirty="0">
                 <a:solidFill>
                   <a:srgbClr val="F2F2F2"/>
                 </a:solidFill>
@@ -2253,7 +2253,7 @@
               <a:buNone/>
             </a:pPr>
             <a:r>
-              <a:rPr lang="en-US" sz="1550" dirty="0">
+              <a:rPr lang="en-US" sz="950" dirty="0">
                 <a:solidFill>
                   <a:srgbClr val="F2F2F2"/>
                 </a:solidFill>
@@ -2269,7 +2269,7 @@
               <a:buNone/>
             </a:pPr>
             <a:r>
-              <a:rPr lang="en-US" sz="1550" dirty="0">
+              <a:rPr lang="en-US" sz="950" dirty="0">
                 <a:solidFill>
                   <a:srgbClr val="F2F2F2"/>
                 </a:solidFill>
@@ -2285,7 +2285,7 @@
               <a:buNone/>
             </a:pPr>
             <a:r>
-              <a:rPr lang="en-US" sz="1550" dirty="0">
+              <a:rPr lang="en-US" sz="950" dirty="0">
                 <a:solidFill>
                   <a:srgbClr val="F2F2F2"/>
                 </a:solidFill>
@@ -2301,7 +2301,7 @@
               <a:buNone/>
             </a:pPr>
             <a:r>
-              <a:rPr lang="en-US" sz="1550" dirty="0">
+              <a:rPr lang="en-US" sz="950" dirty="0">
                 <a:solidFill>
                   <a:srgbClr val="F2F2F2"/>
                 </a:solidFill>
@@ -2317,7 +2317,7 @@
               <a:buNone/>
             </a:pPr>
             <a:r>
-              <a:rPr lang="en-US" sz="1550" dirty="0">
+              <a:rPr lang="en-US" sz="950" dirty="0">
                 <a:solidFill>
                   <a:srgbClr val="F2F2F2"/>
                 </a:solidFill>
@@ -2846,7 +2846,7 @@
               <a:buNone/>
             </a:pPr>
             <a:r>
-              <a:rPr lang="en-US" sz="1450" dirty="0">
+              <a:rPr lang="en-US" sz="1400" dirty="0">
                 <a:solidFill>
                   <a:srgbClr val="F2F2F2"/>
                 </a:solidFill>
@@ -3548,7 +3548,7 @@
               <a:buNone/>
             </a:pPr>
             <a:r>
-              <a:rPr lang="en-US" sz="1450" dirty="0">
+              <a:rPr lang="en-US" sz="950" dirty="0">
                 <a:solidFill>
                   <a:srgbClr val="F2F2F2"/>
                 </a:solidFill>
@@ -3564,7 +3564,7 @@
               <a:buNone/>
             </a:pPr>
             <a:r>
-              <a:rPr lang="en-US" sz="1450" dirty="0" b="1">
+              <a:rPr lang="en-US" sz="950" dirty="0" b="1">
                 <a:solidFill>
                   <a:srgbClr val="F2F2F2"/>
                 </a:solidFill>
@@ -3575,7 +3575,7 @@
               <a:t>• הצורך: </a:t>
             </a:r>
             <a:r>
-              <a:rPr lang="en-US" sz="1450" dirty="0">
+              <a:rPr lang="en-US" sz="950" dirty="0">
                 <a:solidFill>
                   <a:srgbClr val="F2F2F2"/>
                 </a:solidFill>
@@ -3591,7 +3591,7 @@
               <a:buNone/>
             </a:pPr>
             <a:r>
-              <a:rPr lang="en-US" sz="1450" dirty="0" b="1">
+              <a:rPr lang="en-US" sz="950" dirty="0" b="1">
                 <a:solidFill>
                   <a:srgbClr val="F2F2F2"/>
                 </a:solidFill>
@@ -3602,7 +3602,7 @@
               <a:t>• מה מכריע: </a:t>
             </a:r>
             <a:r>
-              <a:rPr lang="en-US" sz="1450" dirty="0">
+              <a:rPr lang="en-US" sz="950" dirty="0">
                 <a:solidFill>
                   <a:srgbClr val="F2F2F2"/>
                 </a:solidFill>
@@ -3683,7 +3683,7 @@
               <a:buNone/>
             </a:pPr>
             <a:r>
-              <a:rPr lang="en-US" sz="1450" dirty="0">
+              <a:rPr lang="en-US" sz="950" dirty="0">
                 <a:solidFill>
                   <a:srgbClr val="F2F2F2"/>
                 </a:solidFill>
@@ -3699,7 +3699,7 @@
               <a:buNone/>
             </a:pPr>
             <a:r>
-              <a:rPr lang="en-US" sz="1450" dirty="0" b="1">
+              <a:rPr lang="en-US" sz="950" dirty="0" b="1">
                 <a:solidFill>
                   <a:srgbClr val="F2F2F2"/>
                 </a:solidFill>
@@ -3710,7 +3710,7 @@
               <a:t>• הצורך: </a:t>
             </a:r>
             <a:r>
-              <a:rPr lang="en-US" sz="1450" dirty="0">
+              <a:rPr lang="en-US" sz="950" dirty="0">
                 <a:solidFill>
                   <a:srgbClr val="F2F2F2"/>
                 </a:solidFill>
@@ -3726,7 +3726,7 @@
               <a:buNone/>
             </a:pPr>
             <a:r>
-              <a:rPr lang="en-US" sz="1450" dirty="0" b="1">
+              <a:rPr lang="en-US" sz="950" dirty="0" b="1">
                 <a:solidFill>
                   <a:srgbClr val="F2F2F2"/>
                 </a:solidFill>
@@ -3737,7 +3737,7 @@
               <a:t>• מה מכריע: </a:t>
             </a:r>
             <a:r>
-              <a:rPr lang="en-US" sz="1450" dirty="0">
+              <a:rPr lang="en-US" sz="950" dirty="0">
                 <a:solidFill>
                   <a:srgbClr val="F2F2F2"/>
                 </a:solidFill>
@@ -3818,7 +3818,7 @@
               <a:buNone/>
             </a:pPr>
             <a:r>
-              <a:rPr lang="en-US" sz="1450" dirty="0" b="1">
+              <a:rPr lang="en-US" sz="800" dirty="0" b="1">
                 <a:solidFill>
                   <a:srgbClr val="F2F2F2"/>
                 </a:solidFill>
@@ -3829,7 +3829,7 @@
               <a:t>• למי להמליץ: </a:t>
             </a:r>
             <a:r>
-              <a:rPr lang="en-US" sz="1450" dirty="0">
+              <a:rPr lang="en-US" sz="800" dirty="0">
                 <a:solidFill>
                   <a:srgbClr val="F2F2F2"/>
                 </a:solidFill>
@@ -3845,7 +3845,7 @@
               <a:buNone/>
             </a:pPr>
             <a:r>
-              <a:rPr lang="en-US" sz="1450" dirty="0" b="1">
+              <a:rPr lang="en-US" sz="800" dirty="0" b="1">
                 <a:solidFill>
                   <a:srgbClr val="F2F2F2"/>
                 </a:solidFill>
@@ -3856,7 +3856,7 @@
               <a:t>• איך לפתוח: </a:t>
             </a:r>
             <a:r>
-              <a:rPr lang="en-US" sz="1450" dirty="0">
+              <a:rPr lang="en-US" sz="800" dirty="0">
                 <a:solidFill>
                   <a:srgbClr val="F2F2F2"/>
                 </a:solidFill>
@@ -3872,7 +3872,7 @@
               <a:buNone/>
             </a:pPr>
             <a:r>
-              <a:rPr lang="en-US" sz="1450" dirty="0" b="1">
+              <a:rPr lang="en-US" sz="800" dirty="0" b="1">
                 <a:solidFill>
                   <a:srgbClr val="F2F2F2"/>
                 </a:solidFill>
@@ -3883,7 +3883,7 @@
               <a:t>• מה להדגיש: </a:t>
             </a:r>
             <a:r>
-              <a:rPr lang="en-US" sz="1450" dirty="0">
+              <a:rPr lang="en-US" sz="800" dirty="0">
                 <a:solidFill>
                   <a:srgbClr val="F2F2F2"/>
                 </a:solidFill>
@@ -4638,7 +4638,7 @@
               <a:buNone/>
             </a:pPr>
             <a:r>
-              <a:rPr lang="en-US" sz="1450" dirty="0">
+              <a:rPr lang="en-US" sz="1350" dirty="0">
                 <a:solidFill>
                   <a:srgbClr val="F2F2F2"/>
                 </a:solidFill>
@@ -4654,7 +4654,7 @@
               <a:buNone/>
             </a:pPr>
             <a:r>
-              <a:rPr lang="en-US" sz="1450" dirty="0">
+              <a:rPr lang="en-US" sz="1350" dirty="0">
                 <a:solidFill>
                   <a:srgbClr val="F2F2F2"/>
                 </a:solidFill>
@@ -4670,7 +4670,7 @@
               <a:buNone/>
             </a:pPr>
             <a:r>
-              <a:rPr lang="en-US" sz="1450" dirty="0">
+              <a:rPr lang="en-US" sz="1350" dirty="0">
                 <a:solidFill>
                   <a:srgbClr val="F2F2F2"/>
                 </a:solidFill>
@@ -4792,7 +4792,7 @@
               <a:buNone/>
             </a:pPr>
             <a:r>
-              <a:rPr lang="en-US" sz="1450" dirty="0" b="1">
+              <a:rPr lang="en-US" sz="800" dirty="0" b="1">
                 <a:solidFill>
                   <a:srgbClr val="F2F2F2"/>
                 </a:solidFill>
@@ -4803,7 +4803,7 @@
               <a:t>לומר: </a:t>
             </a:r>
             <a:r>
-              <a:rPr lang="en-US" sz="1450" dirty="0">
+              <a:rPr lang="en-US" sz="800" dirty="0">
                 <a:solidFill>
                   <a:srgbClr val="F2F2F2"/>
                 </a:solidFill>
@@ -4819,7 +4819,7 @@
               <a:buNone/>
             </a:pPr>
             <a:r>
-              <a:rPr lang="en-US" sz="1450" dirty="0" b="1">
+              <a:rPr lang="en-US" sz="800" dirty="0" b="1">
                 <a:solidFill>
                   <a:srgbClr val="F2F2F2"/>
                 </a:solidFill>
@@ -4830,7 +4830,7 @@
               <a:t>לא לומר: </a:t>
             </a:r>
             <a:r>
-              <a:rPr lang="en-US" sz="1450" dirty="0">
+              <a:rPr lang="en-US" sz="800" dirty="0">
                 <a:solidFill>
                   <a:srgbClr val="F2F2F2"/>
                 </a:solidFill>
@@ -5219,7 +5219,7 @@
               <a:buNone/>
             </a:pPr>
             <a:r>
-              <a:rPr lang="en-US" sz="1450" dirty="0">
+              <a:rPr lang="en-US" sz="1150" dirty="0">
                 <a:solidFill>
                   <a:srgbClr val="F2F2F2"/>
                 </a:solidFill>
@@ -5334,7 +5334,7 @@
               <a:buNone/>
             </a:pPr>
             <a:r>
-              <a:rPr lang="en-US" sz="1450" dirty="0" b="1">
+              <a:rPr lang="en-US" sz="800" dirty="0" b="1">
                 <a:solidFill>
                   <a:srgbClr val="F2F2F2"/>
                 </a:solidFill>
@@ -5345,7 +5345,7 @@
               <a:t>הקולקציה הראשונה של Gessi שנוצרה משורשי במבוק אמיתי </a:t>
             </a:r>
             <a:r>
-              <a:rPr lang="en-US" sz="1450" dirty="0">
+              <a:rPr lang="en-US" sz="800" dirty="0">
                 <a:solidFill>
                   <a:srgbClr val="F2F2F2"/>
                 </a:solidFill>
@@ -5361,7 +5361,7 @@
               <a:buNone/>
             </a:pPr>
             <a:r>
-              <a:rPr lang="en-US" sz="1450" dirty="0" b="1">
+              <a:rPr lang="en-US" sz="800" dirty="0" b="1">
                 <a:solidFill>
                   <a:srgbClr val="F2F2F2"/>
                 </a:solidFill>
@@ -5372,7 +5372,7 @@
               <a:t>726 – Warm Bronze Br. PVD </a:t>
             </a:r>
             <a:r>
-              <a:rPr lang="en-US" sz="1450" dirty="0">
+              <a:rPr lang="en-US" sz="800" dirty="0">
                 <a:solidFill>
                   <a:srgbClr val="F2F2F2"/>
                 </a:solidFill>
@@ -5388,7 +5388,7 @@
               <a:buNone/>
             </a:pPr>
             <a:r>
-              <a:rPr lang="en-US" sz="1450" dirty="0" b="1">
+              <a:rPr lang="en-US" sz="800" dirty="0" b="1">
                 <a:solidFill>
                   <a:srgbClr val="F2F2F2"/>
                 </a:solidFill>
@@ -5399,7 +5399,7 @@
               <a:t>Low spout without waste · With connecting flexibles · Horn-effect lever · Swivel spout </a:t>
             </a:r>
             <a:r>
-              <a:rPr lang="en-US" sz="1450" dirty="0">
+              <a:rPr lang="en-US" sz="800" dirty="0">
                 <a:solidFill>
                   <a:srgbClr val="F2F2F2"/>
                 </a:solidFill>
@@ -5964,7 +5964,7 @@
               <a:buNone/>
             </a:pPr>
             <a:r>
-              <a:rPr lang="en-US" sz="1600" dirty="0">
+              <a:rPr lang="en-US" sz="1050" dirty="0">
                 <a:solidFill>
                   <a:srgbClr val="F2F2F2"/>
                 </a:solidFill>
@@ -5980,7 +5980,7 @@
               <a:buNone/>
             </a:pPr>
             <a:r>
-              <a:rPr lang="en-US" sz="1600" dirty="0">
+              <a:rPr lang="en-US" sz="1050" dirty="0">
                 <a:solidFill>
                   <a:srgbClr val="F2F2F2"/>
                 </a:solidFill>
@@ -5996,7 +5996,7 @@
               <a:buNone/>
             </a:pPr>
             <a:r>
-              <a:rPr lang="en-US" sz="1600" dirty="0">
+              <a:rPr lang="en-US" sz="1050" dirty="0">
                 <a:solidFill>
                   <a:srgbClr val="F2F2F2"/>
                 </a:solidFill>
@@ -6012,7 +6012,7 @@
               <a:buNone/>
             </a:pPr>
             <a:r>
-              <a:rPr lang="en-US" sz="1600" dirty="0">
+              <a:rPr lang="en-US" sz="1050" dirty="0">
                 <a:solidFill>
                   <a:srgbClr val="F2F2F2"/>
                 </a:solidFill>
@@ -6134,7 +6134,7 @@
               <a:buNone/>
             </a:pPr>
             <a:r>
-              <a:rPr lang="en-US" sz="1600" dirty="0" b="1">
+              <a:rPr lang="en-US" sz="900" dirty="0" b="1">
                 <a:solidFill>
                   <a:srgbClr val="F2F2F2"/>
                 </a:solidFill>
@@ -6145,7 +6145,7 @@
               <a:t>• פתיח: </a:t>
             </a:r>
             <a:r>
-              <a:rPr lang="en-US" sz="1600" dirty="0">
+              <a:rPr lang="en-US" sz="900" dirty="0">
                 <a:solidFill>
                   <a:srgbClr val="F2F2F2"/>
                 </a:solidFill>
@@ -6161,7 +6161,7 @@
               <a:buNone/>
             </a:pPr>
             <a:r>
-              <a:rPr lang="en-US" sz="1600" dirty="0" b="1">
+              <a:rPr lang="en-US" sz="900" dirty="0" b="1">
                 <a:solidFill>
                   <a:srgbClr val="F2F2F2"/>
                 </a:solidFill>
@@ -6172,7 +6172,7 @@
               <a:t>• ללקוח הפרטי: </a:t>
             </a:r>
             <a:r>
-              <a:rPr lang="en-US" sz="1600" dirty="0">
+              <a:rPr lang="en-US" sz="900" dirty="0">
                 <a:solidFill>
                   <a:srgbClr val="F2F2F2"/>
                 </a:solidFill>
@@ -6188,7 +6188,7 @@
               <a:buNone/>
             </a:pPr>
             <a:r>
-              <a:rPr lang="en-US" sz="1600" dirty="0" b="1">
+              <a:rPr lang="en-US" sz="900" dirty="0" b="1">
                 <a:solidFill>
                   <a:srgbClr val="F2F2F2"/>
                 </a:solidFill>
@@ -6199,7 +6199,7 @@
               <a:t>• לאדריכלים ומעצבים: </a:t>
             </a:r>
             <a:r>
-              <a:rPr lang="en-US" sz="1600" dirty="0">
+              <a:rPr lang="en-US" sz="900" dirty="0">
                 <a:solidFill>
                   <a:srgbClr val="F2F2F2"/>
                 </a:solidFill>
@@ -6321,7 +6321,7 @@
               <a:buNone/>
             </a:pPr>
             <a:r>
-              <a:rPr lang="en-US" sz="1600" dirty="0">
+              <a:rPr lang="en-US" sz="900" dirty="0">
                 <a:solidFill>
                   <a:srgbClr val="F2F2F2"/>
                 </a:solidFill>
@@ -6337,7 +6337,7 @@
               <a:buNone/>
             </a:pPr>
             <a:r>
-              <a:rPr lang="en-US" sz="1600" dirty="0">
+              <a:rPr lang="en-US" sz="900" dirty="0">
                 <a:solidFill>
                   <a:srgbClr val="F2F2F2"/>
                 </a:solidFill>
@@ -6353,7 +6353,7 @@
               <a:buNone/>
             </a:pPr>
             <a:r>
-              <a:rPr lang="en-US" sz="1600" dirty="0">
+              <a:rPr lang="en-US" sz="900" dirty="0">
                 <a:solidFill>
                   <a:srgbClr val="F2F2F2"/>
                 </a:solidFill>
@@ -6369,7 +6369,7 @@
               <a:buNone/>
             </a:pPr>
             <a:r>
-              <a:rPr lang="en-US" sz="1600" dirty="0" b="1">
+              <a:rPr lang="en-US" sz="900" dirty="0" b="1">
                 <a:solidFill>
                   <a:srgbClr val="F2F2F2"/>
                 </a:solidFill>
@@ -6380,7 +6380,7 @@
               <a:t>• לא להמציא: </a:t>
             </a:r>
             <a:r>
-              <a:rPr lang="en-US" sz="1600" dirty="0">
+              <a:rPr lang="en-US" sz="900" dirty="0">
                 <a:solidFill>
                   <a:srgbClr val="F2F2F2"/>
                 </a:solidFill>
@@ -6772,7 +6772,7 @@
               <a:buNone/>
             </a:pPr>
             <a:r>
-              <a:rPr lang="en-US" sz="1450" dirty="0">
+              <a:rPr lang="en-US" sz="1250" dirty="0">
                 <a:solidFill>
                   <a:srgbClr val="F2F2F2"/>
                 </a:solidFill>
@@ -6788,7 +6788,7 @@
               <a:buNone/>
             </a:pPr>
             <a:r>
-              <a:rPr lang="en-US" sz="1450" dirty="0" b="1">
+              <a:rPr lang="en-US" sz="1250" dirty="0" b="1">
                 <a:solidFill>
                   <a:srgbClr val="F2F2F2"/>
                 </a:solidFill>
@@ -6799,7 +6799,7 @@
               <a:t>סטטוס: </a:t>
             </a:r>
             <a:r>
-              <a:rPr lang="en-US" sz="1450" dirty="0">
+              <a:rPr lang="en-US" sz="1250" dirty="0">
                 <a:solidFill>
                   <a:srgbClr val="F2F2F2"/>
                 </a:solidFill>
@@ -7270,7 +7270,7 @@
               <a:buNone/>
             </a:pPr>
             <a:r>
-              <a:rPr lang="en-US" sz="1700" dirty="0">
+              <a:rPr lang="en-US" sz="950" dirty="0">
                 <a:solidFill>
                   <a:srgbClr val="F2F2F2"/>
                 </a:solidFill>

--- a/out/gessi-jacqueline-77201/launch.pptx
+++ b/out/gessi-jacqueline-77201/launch.pptx
@@ -805,7 +805,7 @@
           <a:lstStyle/>
           <a:p>
             <a:r>
-              <a:t>שלוש השורות לזכור מתוך sales.md.</a:t>
+              <a:t>שלוש השורות לזכור מתוך הנחיות המכירה.</a:t>
             </a:r>
           </a:p>
         </p:txBody>
@@ -1494,7 +1494,7 @@
               <a:buNone/>
             </a:pPr>
             <a:r>
-              <a:rPr lang="en-US" sz="850" dirty="0">
+              <a:rPr lang="en-US" sz="900" dirty="0">
                 <a:solidFill>
                   <a:srgbClr val="F2F2F2"/>
                 </a:solidFill>
@@ -1534,7 +1534,7 @@
               <a:buNone/>
             </a:pPr>
             <a:r>
-              <a:rPr lang="en-US" sz="1000" dirty="0">
+              <a:rPr lang="en-US" sz="1050" dirty="0">
                 <a:solidFill>
                   <a:srgbClr val="BDBDBD"/>
                 </a:solidFill>
@@ -2846,7 +2846,7 @@
               <a:buNone/>
             </a:pPr>
             <a:r>
-              <a:rPr lang="en-US" sz="1400" dirty="0">
+              <a:rPr lang="en-US" sz="1450" dirty="0">
                 <a:solidFill>
                   <a:srgbClr val="F2F2F2"/>
                 </a:solidFill>
@@ -3818,7 +3818,7 @@
               <a:buNone/>
             </a:pPr>
             <a:r>
-              <a:rPr lang="en-US" sz="800" dirty="0" b="1">
+              <a:rPr lang="en-US" sz="950" dirty="0" b="1">
                 <a:solidFill>
                   <a:srgbClr val="F2F2F2"/>
                 </a:solidFill>
@@ -3829,7 +3829,7 @@
               <a:t>• למי להמליץ: </a:t>
             </a:r>
             <a:r>
-              <a:rPr lang="en-US" sz="800" dirty="0">
+              <a:rPr lang="en-US" sz="950" dirty="0">
                 <a:solidFill>
                   <a:srgbClr val="F2F2F2"/>
                 </a:solidFill>
@@ -3845,7 +3845,7 @@
               <a:buNone/>
             </a:pPr>
             <a:r>
-              <a:rPr lang="en-US" sz="800" dirty="0" b="1">
+              <a:rPr lang="en-US" sz="950" dirty="0" b="1">
                 <a:solidFill>
                   <a:srgbClr val="F2F2F2"/>
                 </a:solidFill>
@@ -3856,7 +3856,7 @@
               <a:t>• איך לפתוח: </a:t>
             </a:r>
             <a:r>
-              <a:rPr lang="en-US" sz="800" dirty="0">
+              <a:rPr lang="en-US" sz="950" dirty="0">
                 <a:solidFill>
                   <a:srgbClr val="F2F2F2"/>
                 </a:solidFill>
@@ -3864,7 +3864,7 @@
                 <a:ea typeface="Noto Sans Hebrew" pitchFamily="34" charset="-122"/>
                 <a:cs typeface="Noto Sans Hebrew" pitchFamily="34" charset="-120"/>
               </a:rPr>
-              <a:t>זה Jacqueline 77201 של GESSI. הקולקציה הראשונה של Gessi שנוצרה משורשי במבוק אמיתי.</a:t>
+              <a:t>זה Jacqueline 77201 של GESSI.</a:t>
             </a:r>
           </a:p>
           <a:p>
@@ -3872,7 +3872,7 @@
               <a:buNone/>
             </a:pPr>
             <a:r>
-              <a:rPr lang="en-US" sz="800" dirty="0" b="1">
+              <a:rPr lang="en-US" sz="950" dirty="0" b="1">
                 <a:solidFill>
                   <a:srgbClr val="F2F2F2"/>
                 </a:solidFill>
@@ -3883,7 +3883,7 @@
               <a:t>• מה להדגיש: </a:t>
             </a:r>
             <a:r>
-              <a:rPr lang="en-US" sz="800" dirty="0">
+              <a:rPr lang="en-US" sz="950" dirty="0">
                 <a:solidFill>
                   <a:srgbClr val="F2F2F2"/>
                 </a:solidFill>
@@ -3891,7 +3891,7 @@
                 <a:ea typeface="Noto Sans Hebrew" pitchFamily="34" charset="-122"/>
                 <a:cs typeface="Noto Sans Hebrew" pitchFamily="34" charset="-120"/>
               </a:rPr>
-              <a:t>סיפור מותג להציג ללקוח. גימור שמשלים את שפת החלל.</a:t>
+              <a:t>סיפור מותג להציג ללקוח</a:t>
             </a:r>
           </a:p>
         </p:txBody>
@@ -4792,7 +4792,7 @@
               <a:buNone/>
             </a:pPr>
             <a:r>
-              <a:rPr lang="en-US" sz="800" dirty="0" b="1">
+              <a:rPr lang="en-US" sz="1250" dirty="0" b="1">
                 <a:solidFill>
                   <a:srgbClr val="F2F2F2"/>
                 </a:solidFill>
@@ -4803,7 +4803,7 @@
               <a:t>לומר: </a:t>
             </a:r>
             <a:r>
-              <a:rPr lang="en-US" sz="800" dirty="0">
+              <a:rPr lang="en-US" sz="1250" dirty="0">
                 <a:solidFill>
                   <a:srgbClr val="F2F2F2"/>
                 </a:solidFill>
@@ -4811,34 +4811,7 @@
                 <a:ea typeface="Noto Sans Hebrew" pitchFamily="34" charset="-122"/>
                 <a:cs typeface="Noto Sans Hebrew" pitchFamily="34" charset="-120"/>
               </a:rPr>
-              <a:t>הקולקציה הראשונה של Gessi שנוצרה משורשי במבוק אמיתי.</a:t>
-            </a:r>
-          </a:p>
-          <a:p>
-            <a:pPr marL="0" indent="0" algn="l" rtl="1">
-              <a:buNone/>
-            </a:pPr>
-            <a:r>
-              <a:rPr lang="en-US" sz="800" dirty="0" b="1">
-                <a:solidFill>
-                  <a:srgbClr val="F2F2F2"/>
-                </a:solidFill>
-                <a:latin typeface="Noto Sans Hebrew" pitchFamily="34" charset="0"/>
-                <a:ea typeface="Noto Sans Hebrew" pitchFamily="34" charset="-122"/>
-                <a:cs typeface="Noto Sans Hebrew" pitchFamily="34" charset="-120"/>
-              </a:rPr>
-              <a:t>לא לומר: </a:t>
-            </a:r>
-            <a:r>
-              <a:rPr lang="en-US" sz="800" dirty="0">
-                <a:solidFill>
-                  <a:srgbClr val="F2F2F2"/>
-                </a:solidFill>
-                <a:latin typeface="Noto Sans Hebrew" pitchFamily="34" charset="0"/>
-                <a:ea typeface="Noto Sans Hebrew" pitchFamily="34" charset="-122"/>
-                <a:cs typeface="Noto Sans Hebrew" pitchFamily="34" charset="-120"/>
-              </a:rPr>
-              <a:t>טענות ללא מקור, השוואה למתחרים והבטחות שאי אפשר לאמת (הרשימה המלאה ב-sales.md)</a:t>
+              <a:t>שלושת מסרי המפתח, כלשונם  |  לא לומר: השוואות, סופרלטיבים וטענות ללא מקור</a:t>
             </a:r>
           </a:p>
         </p:txBody>
@@ -5334,7 +5307,7 @@
               <a:buNone/>
             </a:pPr>
             <a:r>
-              <a:rPr lang="en-US" sz="800" dirty="0" b="1">
+              <a:rPr lang="en-US" sz="950" dirty="0" b="1">
                 <a:solidFill>
                   <a:srgbClr val="F2F2F2"/>
                 </a:solidFill>
@@ -5345,7 +5318,7 @@
               <a:t>הקולקציה הראשונה של Gessi שנוצרה משורשי במבוק אמיתי </a:t>
             </a:r>
             <a:r>
-              <a:rPr lang="en-US" sz="800" dirty="0">
+              <a:rPr lang="en-US" sz="950" dirty="0">
                 <a:solidFill>
                   <a:srgbClr val="F2F2F2"/>
                 </a:solidFill>
@@ -5361,7 +5334,7 @@
               <a:buNone/>
             </a:pPr>
             <a:r>
-              <a:rPr lang="en-US" sz="800" dirty="0" b="1">
+              <a:rPr lang="en-US" sz="950" dirty="0" b="1">
                 <a:solidFill>
                   <a:srgbClr val="F2F2F2"/>
                 </a:solidFill>
@@ -5372,7 +5345,7 @@
               <a:t>726 – Warm Bronze Br. PVD </a:t>
             </a:r>
             <a:r>
-              <a:rPr lang="en-US" sz="800" dirty="0">
+              <a:rPr lang="en-US" sz="950" dirty="0">
                 <a:solidFill>
                   <a:srgbClr val="F2F2F2"/>
                 </a:solidFill>
@@ -5388,7 +5361,7 @@
               <a:buNone/>
             </a:pPr>
             <a:r>
-              <a:rPr lang="en-US" sz="800" dirty="0" b="1">
+              <a:rPr lang="en-US" sz="950" dirty="0" b="1">
                 <a:solidFill>
                   <a:srgbClr val="F2F2F2"/>
                 </a:solidFill>
@@ -5396,10 +5369,10 @@
                 <a:ea typeface="Noto Sans Hebrew" pitchFamily="34" charset="-122"/>
                 <a:cs typeface="Noto Sans Hebrew" pitchFamily="34" charset="-120"/>
               </a:rPr>
-              <a:t>Low spout without waste · With connecting flexibles · Horn-effect lever · Swivel spout </a:t>
-            </a:r>
-            <a:r>
-              <a:rPr lang="en-US" sz="800" dirty="0">
+              <a:t>Low spout without waste · With connecting flexibles ועוד </a:t>
+            </a:r>
+            <a:r>
+              <a:rPr lang="en-US" sz="950" dirty="0">
                 <a:solidFill>
                   <a:srgbClr val="F2F2F2"/>
                 </a:solidFill>
@@ -5964,7 +5937,7 @@
               <a:buNone/>
             </a:pPr>
             <a:r>
-              <a:rPr lang="en-US" sz="1050" dirty="0">
+              <a:rPr lang="en-US" sz="1000" dirty="0">
                 <a:solidFill>
                   <a:srgbClr val="F2F2F2"/>
                 </a:solidFill>
@@ -5980,7 +5953,7 @@
               <a:buNone/>
             </a:pPr>
             <a:r>
-              <a:rPr lang="en-US" sz="1050" dirty="0">
+              <a:rPr lang="en-US" sz="1000" dirty="0">
                 <a:solidFill>
                   <a:srgbClr val="F2F2F2"/>
                 </a:solidFill>
@@ -5996,7 +5969,7 @@
               <a:buNone/>
             </a:pPr>
             <a:r>
-              <a:rPr lang="en-US" sz="1050" dirty="0">
+              <a:rPr lang="en-US" sz="1000" dirty="0">
                 <a:solidFill>
                   <a:srgbClr val="F2F2F2"/>
                 </a:solidFill>
@@ -6012,7 +5985,7 @@
               <a:buNone/>
             </a:pPr>
             <a:r>
-              <a:rPr lang="en-US" sz="1050" dirty="0">
+              <a:rPr lang="en-US" sz="1000" dirty="0">
                 <a:solidFill>
                   <a:srgbClr val="F2F2F2"/>
                 </a:solidFill>
@@ -6134,7 +6107,7 @@
               <a:buNone/>
             </a:pPr>
             <a:r>
-              <a:rPr lang="en-US" sz="900" dirty="0" b="1">
+              <a:rPr lang="en-US" sz="1100" dirty="0" b="1">
                 <a:solidFill>
                   <a:srgbClr val="F2F2F2"/>
                 </a:solidFill>
@@ -6145,7 +6118,7 @@
               <a:t>• פתיח: </a:t>
             </a:r>
             <a:r>
-              <a:rPr lang="en-US" sz="900" dirty="0">
+              <a:rPr lang="en-US" sz="1100" dirty="0">
                 <a:solidFill>
                   <a:srgbClr val="F2F2F2"/>
                 </a:solidFill>
@@ -6153,7 +6126,7 @@
                 <a:ea typeface="Noto Sans Hebrew" pitchFamily="34" charset="-122"/>
                 <a:cs typeface="Noto Sans Hebrew" pitchFamily="34" charset="-120"/>
               </a:rPr>
-              <a:t>זה Jacqueline 77201 של GESSI. הקולקציה הראשונה של Gessi שנוצרה משורשי במבוק אמיתי.</a:t>
+              <a:t>זה Jacqueline 77201 של GESSI.</a:t>
             </a:r>
           </a:p>
           <a:p>
@@ -6161,7 +6134,7 @@
               <a:buNone/>
             </a:pPr>
             <a:r>
-              <a:rPr lang="en-US" sz="900" dirty="0" b="1">
+              <a:rPr lang="en-US" sz="1100" dirty="0" b="1">
                 <a:solidFill>
                   <a:srgbClr val="F2F2F2"/>
                 </a:solidFill>
@@ -6172,7 +6145,7 @@
               <a:t>• ללקוח הפרטי: </a:t>
             </a:r>
             <a:r>
-              <a:rPr lang="en-US" sz="900" dirty="0">
+              <a:rPr lang="en-US" sz="1100" dirty="0">
                 <a:solidFill>
                   <a:srgbClr val="F2F2F2"/>
                 </a:solidFill>
@@ -6180,7 +6153,7 @@
                 <a:ea typeface="Noto Sans Hebrew" pitchFamily="34" charset="-122"/>
                 <a:cs typeface="Noto Sans Hebrew" pitchFamily="34" charset="-120"/>
               </a:rPr>
-              <a:t>סיפור מותג להציג ללקוח. גימור שמשלים את שפת החלל.</a:t>
+              <a:t>סיפור מותג להציג ללקוח</a:t>
             </a:r>
           </a:p>
           <a:p>
@@ -6188,7 +6161,7 @@
               <a:buNone/>
             </a:pPr>
             <a:r>
-              <a:rPr lang="en-US" sz="900" dirty="0" b="1">
+              <a:rPr lang="en-US" sz="1100" dirty="0" b="1">
                 <a:solidFill>
                   <a:srgbClr val="F2F2F2"/>
                 </a:solidFill>
@@ -6196,10 +6169,10 @@
                 <a:ea typeface="Noto Sans Hebrew" pitchFamily="34" charset="-122"/>
                 <a:cs typeface="Noto Sans Hebrew" pitchFamily="34" charset="-120"/>
               </a:rPr>
-              <a:t>• לאדריכלים ומעצבים: </a:t>
-            </a:r>
-            <a:r>
-              <a:rPr lang="en-US" sz="900" dirty="0">
+              <a:t>• לאדריכלים: </a:t>
+            </a:r>
+            <a:r>
+              <a:rPr lang="en-US" sz="1100" dirty="0">
                 <a:solidFill>
                   <a:srgbClr val="F2F2F2"/>
                 </a:solidFill>
@@ -6207,7 +6180,7 @@
                 <a:ea typeface="Noto Sans Hebrew" pitchFamily="34" charset="-122"/>
                 <a:cs typeface="Noto Sans Hebrew" pitchFamily="34" charset="-120"/>
               </a:rPr>
-              <a:t>יצרנית איטלקית של ברזים ופתרונות Wellness לחדר הרחצה. MODY – יבואן בלעדי בישראל.</a:t>
+              <a:t>MODY – יבואן בלעדי בישראל.</a:t>
             </a:r>
           </a:p>
         </p:txBody>
@@ -6321,7 +6294,7 @@
               <a:buNone/>
             </a:pPr>
             <a:r>
-              <a:rPr lang="en-US" sz="900" dirty="0">
+              <a:rPr lang="en-US" sz="950" dirty="0">
                 <a:solidFill>
                   <a:srgbClr val="F2F2F2"/>
                 </a:solidFill>
@@ -6329,7 +6302,7 @@
                 <a:ea typeface="Noto Sans Hebrew" pitchFamily="34" charset="-122"/>
                 <a:cs typeface="Noto Sans Hebrew" pitchFamily="34" charset="-120"/>
               </a:rPr>
-              <a:t>• "זה Jacqueline 77201 של GESSI. הקולקציה הראשונה של Gessi שנוצרה משורשי במבוק אמיתי."</a:t>
+              <a:t>• "הקולקציה הראשונה של Gessi שנוצרה משורשי במבוק אמיתי."</a:t>
             </a:r>
           </a:p>
           <a:p>
@@ -6337,7 +6310,7 @@
               <a:buNone/>
             </a:pPr>
             <a:r>
-              <a:rPr lang="en-US" sz="900" dirty="0">
+              <a:rPr lang="en-US" sz="950" dirty="0">
                 <a:solidFill>
                   <a:srgbClr val="F2F2F2"/>
                 </a:solidFill>
@@ -6345,7 +6318,7 @@
                 <a:ea typeface="Noto Sans Hebrew" pitchFamily="34" charset="-122"/>
                 <a:cs typeface="Noto Sans Hebrew" pitchFamily="34" charset="-120"/>
               </a:rPr>
-              <a:t>• "סיפור מותג להציג ללקוח. הקולקציה הראשונה של Gessi שנוצרה משורשי במבוק אמיתי."</a:t>
+              <a:t>• "מידות (מ"מ): H 275 mm × W 80 mm × D 220 mm."</a:t>
             </a:r>
           </a:p>
           <a:p>
@@ -6353,7 +6326,7 @@
               <a:buNone/>
             </a:pPr>
             <a:r>
-              <a:rPr lang="en-US" sz="900" dirty="0">
+              <a:rPr lang="en-US" sz="950" dirty="0">
                 <a:solidFill>
                   <a:srgbClr val="F2F2F2"/>
                 </a:solidFill>
@@ -6361,34 +6334,7 @@
                 <a:ea typeface="Noto Sans Hebrew" pitchFamily="34" charset="-122"/>
                 <a:cs typeface="Noto Sans Hebrew" pitchFamily="34" charset="-120"/>
               </a:rPr>
-              <a:t>• "גימור שמשלים את שפת החלל. גימור: 726 – Warm Bronze Br. PVD."</a:t>
-            </a:r>
-          </a:p>
-          <a:p>
-            <a:pPr marL="0" indent="0" algn="l" rtl="1">
-              <a:buNone/>
-            </a:pPr>
-            <a:r>
-              <a:rPr lang="en-US" sz="900" dirty="0" b="1">
-                <a:solidFill>
-                  <a:srgbClr val="F2F2F2"/>
-                </a:solidFill>
-                <a:latin typeface="Noto Sans Hebrew" pitchFamily="34" charset="0"/>
-                <a:ea typeface="Noto Sans Hebrew" pitchFamily="34" charset="-122"/>
-                <a:cs typeface="Noto Sans Hebrew" pitchFamily="34" charset="-120"/>
-              </a:rPr>
-              <a:t>• לא להמציא: </a:t>
-            </a:r>
-            <a:r>
-              <a:rPr lang="en-US" sz="900" dirty="0">
-                <a:solidFill>
-                  <a:srgbClr val="F2F2F2"/>
-                </a:solidFill>
-                <a:latin typeface="Noto Sans Hebrew" pitchFamily="34" charset="0"/>
-                <a:ea typeface="Noto Sans Hebrew" pitchFamily="34" charset="-122"/>
-                <a:cs typeface="Noto Sans Hebrew" pitchFamily="34" charset="-120"/>
-              </a:rPr>
-              <a:t>טענות ללא מקור, השוואה למתחרים והבטחות שאי אפשר לאמת (הרשימה המלאה ב-sales.md)</a:t>
+              <a:t>• "גימור: 726 – Warm Bronze Br. PVD."</a:t>
             </a:r>
           </a:p>
         </p:txBody>
@@ -6772,7 +6718,7 @@
               <a:buNone/>
             </a:pPr>
             <a:r>
-              <a:rPr lang="en-US" sz="1250" dirty="0">
+              <a:rPr lang="en-US" sz="1350" dirty="0">
                 <a:solidFill>
                   <a:srgbClr val="F2F2F2"/>
                 </a:solidFill>
@@ -6780,7 +6726,7 @@
                 <a:ea typeface="Noto Sans Hebrew" pitchFamily="34" charset="-122"/>
                 <a:cs typeface="Noto Sans Hebrew" pitchFamily="34" charset="-120"/>
               </a:rPr>
-              <a:t>landing.html (דף מוצר) · launch.pptx · landing.md · sales.md · מפרט מאומת מהקובץ</a:t>
+              <a:t>דף מוצר פנימי · מצגת השקה פנימית · הנחיות מכירה · מפרט מאומת מהמקורות</a:t>
             </a:r>
           </a:p>
           <a:p>
@@ -6788,7 +6734,7 @@
               <a:buNone/>
             </a:pPr>
             <a:r>
-              <a:rPr lang="en-US" sz="1250" dirty="0" b="1">
+              <a:rPr lang="en-US" sz="1350" dirty="0" b="1">
                 <a:solidFill>
                   <a:srgbClr val="F2F2F2"/>
                 </a:solidFill>
@@ -6799,7 +6745,7 @@
               <a:t>סטטוס: </a:t>
             </a:r>
             <a:r>
-              <a:rPr lang="en-US" sz="1250" dirty="0">
+              <a:rPr lang="en-US" sz="1350" dirty="0">
                 <a:solidFill>
                   <a:srgbClr val="F2F2F2"/>
                 </a:solidFill>
@@ -6807,7 +6753,7 @@
                 <a:ea typeface="Noto Sans Hebrew" pitchFamily="34" charset="-122"/>
                 <a:cs typeface="Noto Sans Hebrew" pitchFamily="34" charset="-120"/>
               </a:rPr>
-              <a:t>מוכן לרינדור סופי</a:t>
+              <a:t>מוכן להפצה פנימית</a:t>
             </a:r>
           </a:p>
         </p:txBody>
@@ -6927,7 +6873,7 @@
                 <a:ea typeface="Noto Sans Hebrew" pitchFamily="34" charset="-122"/>
                 <a:cs typeface="Noto Sans Hebrew" pitchFamily="34" charset="-120"/>
               </a:rPr>
-              <a:t>sales.md ושקף כלים למכירה זמינים לצוות המכירות · מסרים מאושרים מחבילת ההשקה</a:t>
+              <a:t>הנחיות המכירה ושקף כלים למכירה לצוות המכירות · מסרים מאושרים מחבילת ההשקה</a:t>
             </a:r>
           </a:p>
         </p:txBody>
@@ -7047,7 +6993,7 @@
                 <a:ea typeface="Noto Sans Hebrew" pitchFamily="34" charset="-122"/>
                 <a:cs typeface="Noto Sans Hebrew" pitchFamily="34" charset="-120"/>
               </a:rPr>
-              <a:t>[חסר: launch_plan.channels – לבדיקה]</a:t>
+              <a:t>ערוצי ההשקה טרם הוגדרו: להחלטה עם צוות השיווק</a:t>
             </a:r>
           </a:p>
         </p:txBody>
@@ -7167,7 +7113,7 @@
                 <a:ea typeface="Noto Sans Hebrew" pitchFamily="34" charset="-122"/>
                 <a:cs typeface="Noto Sans Hebrew" pitchFamily="34" charset="-120"/>
               </a:rPr>
-              <a:t>[חסר: launch_plan.measure – לבדיקה]</a:t>
+              <a:t>מדדי ההצלחה טרם הוגדרו: להחלטה לפני ההשקה</a:t>
             </a:r>
           </a:p>
         </p:txBody>
@@ -7270,7 +7216,7 @@
               <a:buNone/>
             </a:pPr>
             <a:r>
-              <a:rPr lang="en-US" sz="950" dirty="0">
+              <a:rPr lang="en-US" sz="1100" dirty="0">
                 <a:solidFill>
                   <a:srgbClr val="F2F2F2"/>
                 </a:solidFill>
@@ -7278,7 +7224,7 @@
                 <a:ea typeface="Noto Sans Hebrew" pitchFamily="34" charset="-122"/>
                 <a:cs typeface="Noto Sans Hebrew" pitchFamily="34" charset="-120"/>
               </a:rPr>
-              <a:t>אחראי: מנהל/ת מוצר  |  סטטוס: מאומת, ניתן לפרסום  |  תאריך השקה: [חסר: launch_plan.launch_date – לבדיקה]  |  החלטות פתוחות: [חסר: technical.flow_rate_lpm – לבדיקה] · [חסר: technical.installation_type – לבדיקה]</a:t>
+              <a:t>אחראי: מנהל/ת מוצר  |  סטטוס: מאומת, ניתן לפרסום  |  תאריך השקה: להגדרה  |  החלטות פתוחות: ספיקה (ל/דק) · סוג התקנה – להשלמה</a:t>
             </a:r>
           </a:p>
         </p:txBody>
